--- a/Group17_Presentation.pptx
+++ b/Group17_Presentation.pptx
@@ -2290,7 +2290,7 @@
                 <a:effectLst/>
                 <a:cs typeface="Times New Roman" panose="02020603050405020304" pitchFamily="18" charset="0"/>
               </a:rPr>
-              <a:t>Aarav Menon 3</a:t>
+              <a:t>Aarav Menon </a:t>
             </a:r>
             <a:r>
               <a:rPr lang="sv-SE" sz="1050" dirty="0">
@@ -2299,7 +2299,7 @@
                 </a:solidFill>
                 <a:cs typeface="Times New Roman" panose="02020603050405020304" pitchFamily="18" charset="0"/>
               </a:rPr>
-              <a:t> (3</a:t>
+              <a:t>(3</a:t>
             </a:r>
             <a:r>
               <a:rPr lang="sv-SE" sz="1050" dirty="0">

--- a/Group17_Presentation.pptx
+++ b/Group17_Presentation.pptx
@@ -2309,7 +2309,7 @@
                 <a:effectLst/>
                 <a:cs typeface="Times New Roman" panose="02020603050405020304" pitchFamily="18" charset="0"/>
               </a:rPr>
-              <a:t>017723 )</a:t>
+              <a:t>017723)</a:t>
             </a:r>
           </a:p>
           <a:p>
@@ -2343,7 +2343,7 @@
                 <a:effectLst/>
                 <a:cs typeface="Times New Roman" panose="02020603050405020304" pitchFamily="18" charset="0"/>
               </a:rPr>
-              <a:t>(3017656 )</a:t>
+              <a:t>(3017656)</a:t>
             </a:r>
           </a:p>
           <a:p>
